--- a/classes/parte-1-redes-y-seguridad-de-redes/039-ataques-de-capa-2-arp-spoofing-y-vlan-hopping/clase-039-presentacion.pptx
+++ b/classes/parte-1-redes-y-seguridad-de-redes/039-ataques-de-capa-2-arp-spoofing-y-vlan-hopping/clase-039-presentacion.pptx
@@ -17,6 +17,9 @@
     <p:sldId id="265" r:id="rId16"/>
     <p:sldId id="266" r:id="rId17"/>
     <p:sldId id="267" r:id="rId18"/>
+    <p:sldId id="268" r:id="rId19"/>
+    <p:sldId id="269" r:id="rId20"/>
+    <p:sldId id="270" r:id="rId21"/>
   </p:sldIdLst>
   <p:sldSz cx="9144000" cy="6858000" type="screen4x3"/>
   <p:notesSz cx="6858000" cy="9144000"/>
@@ -3198,7 +3201,7 @@
                   <a:srgbClr val="0B3D2E"/>
                 </a:solidFill>
               </a:rPr>
-              <a:t>⚠️ Errores comunes</a:t>
+              <a:t>✍️ Ejercicios</a:t>
             </a:r>
           </a:p>
         </p:txBody>
@@ -3236,67 +3239,82 @@
                   <a:srgbClr val="22282E"/>
                 </a:solidFill>
               </a:rPr>
-              <a:t>•  La víctima pierde conectividad durante el MitM — No activaste ipforward; habilítalo para reenviar el tráfico interceptado</a:t>
-            </a:r>
-          </a:p>
-          <a:p>
-            <a:pPr>
-              <a:spcAft>
-                <a:spcPts val="600"/>
-              </a:spcAft>
-            </a:pPr>
-            <a:r>
-              <a:rPr sz="1500">
-                <a:solidFill>
-                  <a:srgbClr val="22282E"/>
-                </a:solidFill>
-              </a:rPr>
-              <a:t>•  ARP spoof no envenena — Firewall de host o entradas ARP estáticas; verifica y ajusta el objetivo</a:t>
-            </a:r>
-          </a:p>
-          <a:p>
-            <a:pPr>
-              <a:spcAft>
-                <a:spcPts val="600"/>
-              </a:spcAft>
-            </a:pPr>
-            <a:r>
-              <a:rPr sz="1500">
-                <a:solidFill>
-                  <a:srgbClr val="22282E"/>
-                </a:solidFill>
-              </a:rPr>
-              <a:t>•  macof no tiene efecto — El switch tiene port security o es virtual con límites; prueba en un entorno adecuado</a:t>
-            </a:r>
-          </a:p>
-          <a:p>
-            <a:pPr>
-              <a:spcAft>
-                <a:spcPts val="600"/>
-              </a:spcAft>
-            </a:pPr>
-            <a:r>
-              <a:rPr sz="1500">
-                <a:solidFill>
-                  <a:srgbClr val="22282E"/>
-                </a:solidFill>
-              </a:rPr>
-              <a:t>•  Double tagging no llega — El puerto no está en la native VLAN esperada; requiere condiciones específicas de trunk</a:t>
-            </a:r>
-          </a:p>
-          <a:p>
-            <a:pPr>
-              <a:spcAft>
-                <a:spcPts val="600"/>
-              </a:spcAft>
-            </a:pPr>
-            <a:r>
-              <a:rPr sz="1500">
-                <a:solidFill>
-                  <a:srgbClr val="22282E"/>
-                </a:solidFill>
-              </a:rPr>
-              <a:t>•  No ves tráfico tras el MitM — Estás en HTTPS; solo verás metadatos, no el contenido (el cifrado protege la carga)</a:t>
+              <a:t>•  Ejecuta ARP spoofing y demuestra que puedes ver el tráfico HTTP de la víctima (en laboratorio).</a:t>
+            </a:r>
+          </a:p>
+          <a:p>
+            <a:pPr>
+              <a:spcAft>
+                <a:spcPts val="600"/>
+              </a:spcAft>
+            </a:pPr>
+            <a:r>
+              <a:rPr sz="1500">
+                <a:solidFill>
+                  <a:srgbClr val="22282E"/>
+                </a:solidFill>
+              </a:rPr>
+              <a:t>•  Observa en Wireshark la firma de un ARP poisoning (respuestas ARP no solicitadas).</a:t>
+            </a:r>
+          </a:p>
+          <a:p>
+            <a:pPr>
+              <a:spcAft>
+                <a:spcPts val="600"/>
+              </a:spcAft>
+            </a:pPr>
+            <a:r>
+              <a:rPr sz="1500">
+                <a:solidFill>
+                  <a:srgbClr val="22282E"/>
+                </a:solidFill>
+              </a:rPr>
+              <a:t>•  Reproduce MAC flooding y explica por qué convierte el switch en un hub.</a:t>
+            </a:r>
+          </a:p>
+          <a:p>
+            <a:pPr>
+              <a:spcAft>
+                <a:spcPts val="600"/>
+              </a:spcAft>
+            </a:pPr>
+            <a:r>
+              <a:rPr sz="1500">
+                <a:solidFill>
+                  <a:srgbClr val="22282E"/>
+                </a:solidFill>
+              </a:rPr>
+              <a:t>•  Explica paso a paso cómo funciona el double tagging y por qué es unidireccional.</a:t>
+            </a:r>
+          </a:p>
+          <a:p>
+            <a:pPr>
+              <a:spcAft>
+                <a:spcPts val="600"/>
+              </a:spcAft>
+            </a:pPr>
+            <a:r>
+              <a:rPr sz="1500">
+                <a:solidFill>
+                  <a:srgbClr val="22282E"/>
+                </a:solidFill>
+              </a:rPr>
+              <a:t>•  Configura port security en un switch de laboratorio y verifica que bloquea macof.</a:t>
+            </a:r>
+          </a:p>
+          <a:p>
+            <a:pPr>
+              <a:spcAft>
+                <a:spcPts val="600"/>
+              </a:spcAft>
+            </a:pPr>
+            <a:r>
+              <a:rPr sz="1500">
+                <a:solidFill>
+                  <a:srgbClr val="22282E"/>
+                </a:solidFill>
+              </a:rPr>
+              <a:t>•  Investiga cómo DAI usa la tabla de DHCP snooping para validar ARP.</a:t>
             </a:r>
           </a:p>
         </p:txBody>
@@ -3347,7 +3365,7 @@
                   <a:srgbClr val="0B3D2E"/>
                 </a:solidFill>
               </a:rPr>
-              <a:t>❓ Preguntas frecuentes</a:t>
+              <a:t>📝 Reto verificable</a:t>
             </a:r>
           </a:p>
         </p:txBody>
@@ -3385,97 +3403,22 @@
                   <a:srgbClr val="22282E"/>
                 </a:solidFill>
               </a:rPr>
-              <a:t>•  ❓ ¿Por qué la capa 2 es tan vulnerable?</a:t>
-            </a:r>
-          </a:p>
-          <a:p>
-            <a:pPr>
-              <a:spcAft>
-                <a:spcPts val="600"/>
-              </a:spcAft>
-            </a:pPr>
-            <a:r>
-              <a:rPr sz="1500">
-                <a:solidFill>
-                  <a:srgbClr val="22282E"/>
-                </a:solidFill>
-              </a:rPr>
-              <a:t>•  Porque ARP y muchos protocolos de switching se diseñaron sin autenticación, confiando en la red local. La seguridad se añade con controles del switch (DAI, port security, 802.1X).</a:t>
-            </a:r>
-          </a:p>
-          <a:p>
-            <a:pPr>
-              <a:spcAft>
-                <a:spcPts val="600"/>
-              </a:spcAft>
-            </a:pPr>
-            <a:r>
-              <a:rPr sz="1500">
-                <a:solidFill>
-                  <a:srgbClr val="22282E"/>
-                </a:solidFill>
-              </a:rPr>
-              <a:t>•  ❓ ¿El MitM por ARP me deja leer HTTPS?</a:t>
-            </a:r>
-          </a:p>
-          <a:p>
-            <a:pPr>
-              <a:spcAft>
-                <a:spcPts val="600"/>
-              </a:spcAft>
-            </a:pPr>
-            <a:r>
-              <a:rPr sz="1500">
-                <a:solidFill>
-                  <a:srgbClr val="22282E"/>
-                </a:solidFill>
-              </a:rPr>
-              <a:t>•  No el contenido. Verás metadatos (IPs, SNI en algunos casos), pero el cifrado TLS protege los datos salvo que consigas que la víctima acepte un certificado falso (otra clase).</a:t>
-            </a:r>
-          </a:p>
-          <a:p>
-            <a:pPr>
-              <a:spcAft>
-                <a:spcPts val="600"/>
-              </a:spcAft>
-            </a:pPr>
-            <a:r>
-              <a:rPr sz="1500">
-                <a:solidFill>
-                  <a:srgbClr val="22282E"/>
-                </a:solidFill>
-              </a:rPr>
-              <a:t>•  ❓ ¿VLAN hopping funciona en cualquier switch?</a:t>
-            </a:r>
-          </a:p>
-          <a:p>
-            <a:pPr>
-              <a:spcAft>
-                <a:spcPts val="600"/>
-              </a:spcAft>
-            </a:pPr>
-            <a:r>
-              <a:rPr sz="1500">
-                <a:solidFill>
-                  <a:srgbClr val="22282E"/>
-                </a:solidFill>
-              </a:rPr>
-              <a:t>•  No. El switch spoofing requiere DTP activo; el double tagging requiere condiciones concretas de native VLAN. Configuraciones endurecidas lo impiden.</a:t>
-            </a:r>
-          </a:p>
-          <a:p>
-            <a:pPr>
-              <a:spcAft>
-                <a:spcPts val="600"/>
-              </a:spcAft>
-            </a:pPr>
-            <a:r>
-              <a:rPr sz="1500">
-                <a:solidFill>
-                  <a:srgbClr val="22282E"/>
-                </a:solidFill>
-              </a:rPr>
-              <a:t>•  ❓ ¿Cuál es la defensa más efectiva contra ARP spoofing?</a:t>
+              <a:t>•  En tu laboratorio, posiciona la máquina atacante como MitM entre dos VMs mediante ARP spoofing y demuestra la intercepción de una comunicación en claro. Después, aplica una contramedida (DAI en el…</a:t>
+            </a:r>
+          </a:p>
+          <a:p>
+            <a:pPr>
+              <a:spcAft>
+                <a:spcPts val="600"/>
+              </a:spcAft>
+            </a:pPr>
+            <a:r>
+              <a:rPr sz="1500">
+                <a:solidFill>
+                  <a:srgbClr val="22282E"/>
+                </a:solidFill>
+              </a:rPr>
+              <a:t>•  Criterio de aceptación: en la fase de ataque interceptas tráfico entre las dos VMs; tras la contramedida, la tabla ARP de la víctima ya no se envenena y no capturas su tráfico. Todo en entorno propio.</a:t>
             </a:r>
           </a:p>
         </p:txBody>
@@ -3526,7 +3469,7 @@
                   <a:srgbClr val="0B3D2E"/>
                 </a:solidFill>
               </a:rPr>
-              <a:t>🔗 Referencias</a:t>
+              <a:t>⚠️ Errores comunes</a:t>
             </a:r>
           </a:p>
         </p:txBody>
@@ -3564,6 +3507,334 @@
                   <a:srgbClr val="22282E"/>
                 </a:solidFill>
               </a:rPr>
+              <a:t>•  La víctima pierde conectividad durante el MitM — No activaste ipforward; habilítalo para reenviar el tráfico interceptado</a:t>
+            </a:r>
+          </a:p>
+          <a:p>
+            <a:pPr>
+              <a:spcAft>
+                <a:spcPts val="600"/>
+              </a:spcAft>
+            </a:pPr>
+            <a:r>
+              <a:rPr sz="1500">
+                <a:solidFill>
+                  <a:srgbClr val="22282E"/>
+                </a:solidFill>
+              </a:rPr>
+              <a:t>•  ARP spoof no envenena — Firewall de host o entradas ARP estáticas; verifica y ajusta el objetivo</a:t>
+            </a:r>
+          </a:p>
+          <a:p>
+            <a:pPr>
+              <a:spcAft>
+                <a:spcPts val="600"/>
+              </a:spcAft>
+            </a:pPr>
+            <a:r>
+              <a:rPr sz="1500">
+                <a:solidFill>
+                  <a:srgbClr val="22282E"/>
+                </a:solidFill>
+              </a:rPr>
+              <a:t>•  macof no tiene efecto — El switch tiene port security o es virtual con límites; prueba en un entorno adecuado</a:t>
+            </a:r>
+          </a:p>
+          <a:p>
+            <a:pPr>
+              <a:spcAft>
+                <a:spcPts val="600"/>
+              </a:spcAft>
+            </a:pPr>
+            <a:r>
+              <a:rPr sz="1500">
+                <a:solidFill>
+                  <a:srgbClr val="22282E"/>
+                </a:solidFill>
+              </a:rPr>
+              <a:t>•  Double tagging no llega — El puerto no está en la native VLAN esperada; requiere condiciones específicas de trunk</a:t>
+            </a:r>
+          </a:p>
+          <a:p>
+            <a:pPr>
+              <a:spcAft>
+                <a:spcPts val="600"/>
+              </a:spcAft>
+            </a:pPr>
+            <a:r>
+              <a:rPr sz="1500">
+                <a:solidFill>
+                  <a:srgbClr val="22282E"/>
+                </a:solidFill>
+              </a:rPr>
+              <a:t>•  No ves tráfico tras el MitM — Estás en HTTPS; solo verás metadatos, no el contenido (el cifrado protege la carga)</a:t>
+            </a:r>
+          </a:p>
+        </p:txBody>
+      </p:sp>
+    </p:spTree>
+  </p:cSld>
+  <p:clrMapOvr>
+    <a:masterClrMapping/>
+  </p:clrMapOvr>
+</p:sld>
+</file>
+
+<file path=ppt/slides/slide13.xml><?xml version="1.0" encoding="utf-8"?>
+<p:sld xmlns:a="http://schemas.openxmlformats.org/drawingml/2006/main" xmlns:p="http://schemas.openxmlformats.org/presentationml/2006/main" xmlns:r="http://schemas.openxmlformats.org/officeDocument/2006/relationships">
+  <p:cSld>
+    <p:spTree>
+      <p:nvGrpSpPr>
+        <p:cNvPr id="1" name=""/>
+        <p:cNvGrpSpPr/>
+        <p:nvPr/>
+      </p:nvGrpSpPr>
+      <p:grpSpPr/>
+      <p:sp>
+        <p:nvSpPr>
+          <p:cNvPr id="2" name="TextBox 1"/>
+          <p:cNvSpPr txBox="1"/>
+          <p:nvPr/>
+        </p:nvSpPr>
+        <p:spPr>
+          <a:xfrm>
+            <a:off x="457200" y="320040"/>
+            <a:ext cx="8229600" cy="822960"/>
+          </a:xfrm>
+          <a:prstGeom prst="rect">
+            <a:avLst/>
+          </a:prstGeom>
+          <a:noFill/>
+        </p:spPr>
+        <p:txBody>
+          <a:bodyPr wrap="square">
+            <a:spAutoFit/>
+          </a:bodyPr>
+          <a:lstStyle/>
+          <a:p>
+            <a:r>
+              <a:rPr sz="2600" b="1">
+                <a:solidFill>
+                  <a:srgbClr val="0B3D2E"/>
+                </a:solidFill>
+              </a:rPr>
+              <a:t>❓ Preguntas frecuentes</a:t>
+            </a:r>
+          </a:p>
+        </p:txBody>
+      </p:sp>
+      <p:sp>
+        <p:nvSpPr>
+          <p:cNvPr id="3" name="TextBox 2"/>
+          <p:cNvSpPr txBox="1"/>
+          <p:nvPr/>
+        </p:nvSpPr>
+        <p:spPr>
+          <a:xfrm>
+            <a:off x="457200" y="1280160"/>
+            <a:ext cx="8229600" cy="4937760"/>
+          </a:xfrm>
+          <a:prstGeom prst="rect">
+            <a:avLst/>
+          </a:prstGeom>
+          <a:noFill/>
+        </p:spPr>
+        <p:txBody>
+          <a:bodyPr wrap="square">
+            <a:spAutoFit/>
+          </a:bodyPr>
+          <a:lstStyle/>
+          <a:p>
+            <a:pPr>
+              <a:spcAft>
+                <a:spcPts val="600"/>
+              </a:spcAft>
+            </a:pPr>
+            <a:r>
+              <a:rPr sz="1500">
+                <a:solidFill>
+                  <a:srgbClr val="22282E"/>
+                </a:solidFill>
+              </a:rPr>
+              <a:t>•  ❓ ¿Por qué la capa 2 es tan vulnerable?</a:t>
+            </a:r>
+          </a:p>
+          <a:p>
+            <a:pPr>
+              <a:spcAft>
+                <a:spcPts val="600"/>
+              </a:spcAft>
+            </a:pPr>
+            <a:r>
+              <a:rPr sz="1500">
+                <a:solidFill>
+                  <a:srgbClr val="22282E"/>
+                </a:solidFill>
+              </a:rPr>
+              <a:t>•  Porque ARP y muchos protocolos de switching se diseñaron sin autenticación, confiando en la red local. La seguridad se añade con controles del switch (DAI, port security, 802.1X).</a:t>
+            </a:r>
+          </a:p>
+          <a:p>
+            <a:pPr>
+              <a:spcAft>
+                <a:spcPts val="600"/>
+              </a:spcAft>
+            </a:pPr>
+            <a:r>
+              <a:rPr sz="1500">
+                <a:solidFill>
+                  <a:srgbClr val="22282E"/>
+                </a:solidFill>
+              </a:rPr>
+              <a:t>•  ❓ ¿El MitM por ARP me deja leer HTTPS?</a:t>
+            </a:r>
+          </a:p>
+          <a:p>
+            <a:pPr>
+              <a:spcAft>
+                <a:spcPts val="600"/>
+              </a:spcAft>
+            </a:pPr>
+            <a:r>
+              <a:rPr sz="1500">
+                <a:solidFill>
+                  <a:srgbClr val="22282E"/>
+                </a:solidFill>
+              </a:rPr>
+              <a:t>•  No el contenido. Verás metadatos (IPs, SNI en algunos casos), pero el cifrado TLS protege los datos salvo que consigas que la víctima acepte un certificado falso (otra clase).</a:t>
+            </a:r>
+          </a:p>
+          <a:p>
+            <a:pPr>
+              <a:spcAft>
+                <a:spcPts val="600"/>
+              </a:spcAft>
+            </a:pPr>
+            <a:r>
+              <a:rPr sz="1500">
+                <a:solidFill>
+                  <a:srgbClr val="22282E"/>
+                </a:solidFill>
+              </a:rPr>
+              <a:t>•  ❓ ¿VLAN hopping funciona en cualquier switch?</a:t>
+            </a:r>
+          </a:p>
+          <a:p>
+            <a:pPr>
+              <a:spcAft>
+                <a:spcPts val="600"/>
+              </a:spcAft>
+            </a:pPr>
+            <a:r>
+              <a:rPr sz="1500">
+                <a:solidFill>
+                  <a:srgbClr val="22282E"/>
+                </a:solidFill>
+              </a:rPr>
+              <a:t>•  No. El switch spoofing requiere DTP activo; el double tagging requiere condiciones concretas de native VLAN. Configuraciones endurecidas lo impiden.</a:t>
+            </a:r>
+          </a:p>
+          <a:p>
+            <a:pPr>
+              <a:spcAft>
+                <a:spcPts val="600"/>
+              </a:spcAft>
+            </a:pPr>
+            <a:r>
+              <a:rPr sz="1500">
+                <a:solidFill>
+                  <a:srgbClr val="22282E"/>
+                </a:solidFill>
+              </a:rPr>
+              <a:t>•  ❓ ¿Cuál es la defensa más efectiva contra ARP spoofing?</a:t>
+            </a:r>
+          </a:p>
+        </p:txBody>
+      </p:sp>
+    </p:spTree>
+  </p:cSld>
+  <p:clrMapOvr>
+    <a:masterClrMapping/>
+  </p:clrMapOvr>
+</p:sld>
+</file>
+
+<file path=ppt/slides/slide14.xml><?xml version="1.0" encoding="utf-8"?>
+<p:sld xmlns:a="http://schemas.openxmlformats.org/drawingml/2006/main" xmlns:p="http://schemas.openxmlformats.org/presentationml/2006/main" xmlns:r="http://schemas.openxmlformats.org/officeDocument/2006/relationships">
+  <p:cSld>
+    <p:spTree>
+      <p:nvGrpSpPr>
+        <p:cNvPr id="1" name=""/>
+        <p:cNvGrpSpPr/>
+        <p:nvPr/>
+      </p:nvGrpSpPr>
+      <p:grpSpPr/>
+      <p:sp>
+        <p:nvSpPr>
+          <p:cNvPr id="2" name="TextBox 1"/>
+          <p:cNvSpPr txBox="1"/>
+          <p:nvPr/>
+        </p:nvSpPr>
+        <p:spPr>
+          <a:xfrm>
+            <a:off x="457200" y="320040"/>
+            <a:ext cx="8229600" cy="822960"/>
+          </a:xfrm>
+          <a:prstGeom prst="rect">
+            <a:avLst/>
+          </a:prstGeom>
+          <a:noFill/>
+        </p:spPr>
+        <p:txBody>
+          <a:bodyPr wrap="square">
+            <a:spAutoFit/>
+          </a:bodyPr>
+          <a:lstStyle/>
+          <a:p>
+            <a:r>
+              <a:rPr sz="2600" b="1">
+                <a:solidFill>
+                  <a:srgbClr val="0B3D2E"/>
+                </a:solidFill>
+              </a:rPr>
+              <a:t>🔗 Referencias</a:t>
+            </a:r>
+          </a:p>
+        </p:txBody>
+      </p:sp>
+      <p:sp>
+        <p:nvSpPr>
+          <p:cNvPr id="3" name="TextBox 2"/>
+          <p:cNvSpPr txBox="1"/>
+          <p:nvPr/>
+        </p:nvSpPr>
+        <p:spPr>
+          <a:xfrm>
+            <a:off x="457200" y="1280160"/>
+            <a:ext cx="8229600" cy="4937760"/>
+          </a:xfrm>
+          <a:prstGeom prst="rect">
+            <a:avLst/>
+          </a:prstGeom>
+          <a:noFill/>
+        </p:spPr>
+        <p:txBody>
+          <a:bodyPr wrap="square">
+            <a:spAutoFit/>
+          </a:bodyPr>
+          <a:lstStyle/>
+          <a:p>
+            <a:pPr>
+              <a:spcAft>
+                <a:spcPts val="600"/>
+              </a:spcAft>
+            </a:pPr>
+            <a:r>
+              <a:rPr sz="1500">
+                <a:solidFill>
+                  <a:srgbClr val="22282E"/>
+                </a:solidFill>
+              </a:rPr>
               <a:t>•  IEEE 802.1Q (VLAN tagging). &lt;https://standards.ieee.org/ieee/802.1Q/&gt;</a:t>
             </a:r>
           </a:p>
@@ -3614,6 +3885,81 @@
           </a:p>
         </p:txBody>
       </p:sp>
+    </p:spTree>
+  </p:cSld>
+  <p:clrMapOvr>
+    <a:masterClrMapping/>
+  </p:clrMapOvr>
+</p:sld>
+</file>
+
+<file path=ppt/slides/slide15.xml><?xml version="1.0" encoding="utf-8"?>
+<p:sld xmlns:a="http://schemas.openxmlformats.org/drawingml/2006/main" xmlns:p="http://schemas.openxmlformats.org/presentationml/2006/main" xmlns:r="http://schemas.openxmlformats.org/officeDocument/2006/relationships">
+  <p:cSld>
+    <p:spTree>
+      <p:nvGrpSpPr>
+        <p:cNvPr id="1" name=""/>
+        <p:cNvGrpSpPr/>
+        <p:nvPr/>
+      </p:nvGrpSpPr>
+      <p:grpSpPr/>
+      <p:sp>
+        <p:nvSpPr>
+          <p:cNvPr id="2" name="TextBox 1"/>
+          <p:cNvSpPr txBox="1"/>
+          <p:nvPr/>
+        </p:nvSpPr>
+        <p:spPr>
+          <a:xfrm>
+            <a:off x="457200" y="274320"/>
+            <a:ext cx="8229600" cy="640080"/>
+          </a:xfrm>
+          <a:prstGeom prst="rect">
+            <a:avLst/>
+          </a:prstGeom>
+          <a:noFill/>
+        </p:spPr>
+        <p:txBody>
+          <a:bodyPr wrap="square">
+            <a:spAutoFit/>
+          </a:bodyPr>
+          <a:lstStyle/>
+          <a:p>
+            <a:r>
+              <a:rPr sz="2200" b="1">
+                <a:solidFill>
+                  <a:srgbClr val="0B3D2E"/>
+                </a:solidFill>
+              </a:rPr>
+              <a:t>Diagrama de la clase</a:t>
+            </a:r>
+          </a:p>
+        </p:txBody>
+      </p:sp>
+      <p:pic>
+        <p:nvPicPr>
+          <p:cNvPr id="3" name="Picture 2" descr="b8d3f80dfe7d2718.png"/>
+          <p:cNvPicPr>
+            <a:picLocks noChangeAspect="1"/>
+          </p:cNvPicPr>
+          <p:nvPr/>
+        </p:nvPicPr>
+        <p:blipFill>
+          <a:blip r:embed="rId2"/>
+          <a:stretch>
+            <a:fillRect/>
+          </a:stretch>
+        </p:blipFill>
+        <p:spPr>
+          <a:xfrm>
+            <a:off x="457200" y="3204972"/>
+            <a:ext cx="8229600" cy="1088136"/>
+          </a:xfrm>
+          <a:prstGeom prst="rect">
+            <a:avLst/>
+          </a:prstGeom>
+        </p:spPr>
+      </p:pic>
     </p:spTree>
   </p:cSld>
   <p:clrMapOvr>
@@ -3698,7 +4044,7 @@
                   <a:srgbClr val="22282E"/>
                 </a:solidFill>
               </a:rPr>
-              <a:t>•  Explorar los ataques que operan en la capa de enlace (capa 2), donde muchos controles de seguridad de capas superiores no llegan: ARP spoofing/poisoning, MAC flooding, STP manipulation y VLAN hopping. El alumno reproducirá estos ataques en laboratorio y aprenderá las contramedidas (DAI, port security, PVLAN).</a:t>
+              <a:t>•  Explorar los ataques que operan en la capa de enlace (capa 2), donde muchos controles de seguridad de capas superiores no llegan: ARP spoofing/poisoning, MAC flooding, STP manipulation y VLAN…</a:t>
             </a:r>
           </a:p>
         </p:txBody>
@@ -4107,7 +4453,7 @@
                   <a:srgbClr val="0B3D2E"/>
                 </a:solidFill>
               </a:rPr>
-              <a:t>📖 Definiciones y características</a:t>
+              <a:t>🧠 Explicación en profundidad</a:t>
             </a:r>
           </a:p>
         </p:txBody>
@@ -4145,82 +4491,97 @@
                   <a:srgbClr val="22282E"/>
                 </a:solidFill>
               </a:rPr>
-              <a:t>•  ARP: protocolo que asocia IP a MAC en una LAN; no tiene autenticación, así que cualquiera puede enviar respuestas falsas.</a:t>
-            </a:r>
-          </a:p>
-          <a:p>
-            <a:pPr>
-              <a:spcAft>
-                <a:spcPts val="600"/>
-              </a:spcAft>
-            </a:pPr>
-            <a:r>
-              <a:rPr sz="1500">
-                <a:solidFill>
-                  <a:srgbClr val="22282E"/>
-                </a:solidFill>
-              </a:rPr>
-              <a:t>•  ARP poisoning: envío de respuestas ARP falsificadas para que las víctimas asocien la IP del gateway con la MAC del atacante, redirigiendo su tráfico.</a:t>
-            </a:r>
-          </a:p>
-          <a:p>
-            <a:pPr>
-              <a:spcAft>
-                <a:spcPts val="600"/>
-              </a:spcAft>
-            </a:pPr>
-            <a:r>
-              <a:rPr sz="1500">
-                <a:solidFill>
-                  <a:srgbClr val="22282E"/>
-                </a:solidFill>
-              </a:rPr>
-              <a:t>•  MAC flooding: inundar la tabla CAM del switch con MAC falsas hasta desbordarla; el switch pasa a difundir todo (fail-open), permitiendo sniffing.</a:t>
-            </a:r>
-          </a:p>
-          <a:p>
-            <a:pPr>
-              <a:spcAft>
-                <a:spcPts val="600"/>
-              </a:spcAft>
-            </a:pPr>
-            <a:r>
-              <a:rPr sz="1500">
-                <a:solidFill>
-                  <a:srgbClr val="22282E"/>
-                </a:solidFill>
-              </a:rPr>
-              <a:t>•  VLAN hopping: técnica para enviar tráfico a una VLAN distinta a la asignada, saltando la segmentación; por switch spoofing (DTP) o double tagging 802.1Q.</a:t>
-            </a:r>
-          </a:p>
-          <a:p>
-            <a:pPr>
-              <a:spcAft>
-                <a:spcPts val="600"/>
-              </a:spcAft>
-            </a:pPr>
-            <a:r>
-              <a:rPr sz="1500">
-                <a:solidFill>
-                  <a:srgbClr val="22282E"/>
-                </a:solidFill>
-              </a:rPr>
-              <a:t>•  DAI (Dynamic ARP Inspection): control de switch que valida los paquetes ARP contra la tabla DHCP snooping y descarta los falsos.</a:t>
-            </a:r>
-          </a:p>
-          <a:p>
-            <a:pPr>
-              <a:spcAft>
-                <a:spcPts val="600"/>
-              </a:spcAft>
-            </a:pPr>
-            <a:r>
-              <a:rPr sz="1500">
-                <a:solidFill>
-                  <a:srgbClr val="22282E"/>
-                </a:solidFill>
-              </a:rPr>
-              <a:t>•  Port security: limita las MAC permitidas por puerto, mitigando el MAC flooding.</a:t>
+              <a:t>•  La capa 2 se diseñó para una LAN pequeña donde todos los equipos eran de fiar, y esa</a:t>
+            </a:r>
+          </a:p>
+          <a:p>
+            <a:pPr>
+              <a:spcAft>
+                <a:spcPts val="600"/>
+              </a:spcAft>
+            </a:pPr>
+            <a:r>
+              <a:rPr sz="1500">
+                <a:solidFill>
+                  <a:srgbClr val="22282E"/>
+                </a:solidFill>
+              </a:rPr>
+              <a:t>•  suposición no se corrigió nunca. ARP, el protocolo que traduce una IP en la MAC del</a:t>
+            </a:r>
+          </a:p>
+          <a:p>
+            <a:pPr>
+              <a:spcAft>
+                <a:spcPts val="600"/>
+              </a:spcAft>
+            </a:pPr>
+            <a:r>
+              <a:rPr sz="1500">
+                <a:solidFill>
+                  <a:srgbClr val="22282E"/>
+                </a:solidFill>
+              </a:rPr>
+              <a:t>•  equipo que la tiene, no lleva autenticación de ningún tipo: cuando un host pregunta</a:t>
+            </a:r>
+          </a:p>
+          <a:p>
+            <a:pPr>
+              <a:spcAft>
+                <a:spcPts val="600"/>
+              </a:spcAft>
+            </a:pPr>
+            <a:r>
+              <a:rPr sz="1500">
+                <a:solidFill>
+                  <a:srgbClr val="22282E"/>
+                </a:solidFill>
+              </a:rPr>
+              <a:t>•  "¿quién tiene 10.0.0.1?", cualquiera puede responder "yo", y el que pregunta se lo cree</a:t>
+            </a:r>
+          </a:p>
+          <a:p>
+            <a:pPr>
+              <a:spcAft>
+                <a:spcPts val="600"/>
+              </a:spcAft>
+            </a:pPr>
+            <a:r>
+              <a:rPr sz="1500">
+                <a:solidFill>
+                  <a:srgbClr val="22282E"/>
+                </a:solidFill>
+              </a:rPr>
+              <a:t>•  y guarda la respuesta en su caché. Ese es el fallo del que cuelgan casi todos los</a:t>
+            </a:r>
+          </a:p>
+          <a:p>
+            <a:pPr>
+              <a:spcAft>
+                <a:spcPts val="600"/>
+              </a:spcAft>
+            </a:pPr>
+            <a:r>
+              <a:rPr sz="1500">
+                <a:solidFill>
+                  <a:srgbClr val="22282E"/>
+                </a:solidFill>
+              </a:rPr>
+              <a:t>•  ataques de esta clase. Lo importante de entenderlo es que no es un bug que se pueda</a:t>
+            </a:r>
+          </a:p>
+          <a:p>
+            <a:pPr>
+              <a:spcAft>
+                <a:spcPts val="600"/>
+              </a:spcAft>
+            </a:pPr>
+            <a:r>
+              <a:rPr sz="1500">
+                <a:solidFill>
+                  <a:srgbClr val="22282E"/>
+                </a:solidFill>
+              </a:rPr>
+              <a:t>•  parchear: es cómo funciona ARP por diseño, así que la defensa no consiste en arreglar</a:t>
             </a:r>
           </a:p>
         </p:txBody>
@@ -4271,7 +4632,7 @@
                   <a:srgbClr val="0B3D2E"/>
                 </a:solidFill>
               </a:rPr>
-              <a:t>🧰 Herramientas y preparación</a:t>
+              <a:t>📖 Definiciones y características</a:t>
             </a:r>
           </a:p>
         </p:txBody>
@@ -4309,67 +4670,82 @@
                   <a:srgbClr val="22282E"/>
                 </a:solidFill>
               </a:rPr>
-              <a:t>•  ettercap / bettercap para ARP spoofing y MitM.</a:t>
-            </a:r>
-          </a:p>
-          <a:p>
-            <a:pPr>
-              <a:spcAft>
-                <a:spcPts val="600"/>
-              </a:spcAft>
-            </a:pPr>
-            <a:r>
-              <a:rPr sz="1500">
-                <a:solidFill>
-                  <a:srgbClr val="22282E"/>
-                </a:solidFill>
-              </a:rPr>
-              <a:t>•  macof (dsniff) para MAC flooding.</a:t>
-            </a:r>
-          </a:p>
-          <a:p>
-            <a:pPr>
-              <a:spcAft>
-                <a:spcPts val="600"/>
-              </a:spcAft>
-            </a:pPr>
-            <a:r>
-              <a:rPr sz="1500">
-                <a:solidFill>
-                  <a:srgbClr val="22282E"/>
-                </a:solidFill>
-              </a:rPr>
-              <a:t>•  yersinia para ataques a STP/DTP/VLAN.</a:t>
-            </a:r>
-          </a:p>
-          <a:p>
-            <a:pPr>
-              <a:spcAft>
-                <a:spcPts val="600"/>
-              </a:spcAft>
-            </a:pPr>
-            <a:r>
-              <a:rPr sz="1500">
-                <a:solidFill>
-                  <a:srgbClr val="22282E"/>
-                </a:solidFill>
-              </a:rPr>
-              <a:t>•  scapy para construir tramas 802.1Q a medida.</a:t>
-            </a:r>
-          </a:p>
-          <a:p>
-            <a:pPr>
-              <a:spcAft>
-                <a:spcPts val="600"/>
-              </a:spcAft>
-            </a:pPr>
-            <a:r>
-              <a:rPr sz="1500">
-                <a:solidFill>
-                  <a:srgbClr val="22282E"/>
-                </a:solidFill>
-              </a:rPr>
-              <a:t>•  Laboratorio: varias VMs en un switch virtual; idealmente un switch gestionable (o GNS3/EVE-NG) para practicar VLANs y contramedidas.</a:t>
+              <a:t>•  ARP: protocolo que asocia IP a MAC en una LAN; no tiene autenticación, así que cualquiera puede enviar respuestas falsas.</a:t>
+            </a:r>
+          </a:p>
+          <a:p>
+            <a:pPr>
+              <a:spcAft>
+                <a:spcPts val="600"/>
+              </a:spcAft>
+            </a:pPr>
+            <a:r>
+              <a:rPr sz="1500">
+                <a:solidFill>
+                  <a:srgbClr val="22282E"/>
+                </a:solidFill>
+              </a:rPr>
+              <a:t>•  ARP poisoning: envío de respuestas ARP falsificadas para que las víctimas asocien la IP del gateway con la MAC del atacante, redirigiendo su tráfico.</a:t>
+            </a:r>
+          </a:p>
+          <a:p>
+            <a:pPr>
+              <a:spcAft>
+                <a:spcPts val="600"/>
+              </a:spcAft>
+            </a:pPr>
+            <a:r>
+              <a:rPr sz="1500">
+                <a:solidFill>
+                  <a:srgbClr val="22282E"/>
+                </a:solidFill>
+              </a:rPr>
+              <a:t>•  MAC flooding: inundar la tabla CAM del switch con MAC falsas hasta desbordarla; el switch pasa a difundir todo (fail-open), permitiendo sniffing.</a:t>
+            </a:r>
+          </a:p>
+          <a:p>
+            <a:pPr>
+              <a:spcAft>
+                <a:spcPts val="600"/>
+              </a:spcAft>
+            </a:pPr>
+            <a:r>
+              <a:rPr sz="1500">
+                <a:solidFill>
+                  <a:srgbClr val="22282E"/>
+                </a:solidFill>
+              </a:rPr>
+              <a:t>•  VLAN hopping: técnica para enviar tráfico a una VLAN distinta a la asignada, saltando la segmentación; por switch spoofing (DTP) o double tagging 802.1Q.</a:t>
+            </a:r>
+          </a:p>
+          <a:p>
+            <a:pPr>
+              <a:spcAft>
+                <a:spcPts val="600"/>
+              </a:spcAft>
+            </a:pPr>
+            <a:r>
+              <a:rPr sz="1500">
+                <a:solidFill>
+                  <a:srgbClr val="22282E"/>
+                </a:solidFill>
+              </a:rPr>
+              <a:t>•  DAI (Dynamic ARP Inspection): control de switch que valida los paquetes ARP contra la tabla DHCP snooping y descarta los falsos.</a:t>
+            </a:r>
+          </a:p>
+          <a:p>
+            <a:pPr>
+              <a:spcAft>
+                <a:spcPts val="600"/>
+              </a:spcAft>
+            </a:pPr>
+            <a:r>
+              <a:rPr sz="1500">
+                <a:solidFill>
+                  <a:srgbClr val="22282E"/>
+                </a:solidFill>
+              </a:rPr>
+              <a:t>•  Port security: limita las MAC permitidas por puerto, mitigando el MAC flooding.</a:t>
             </a:r>
           </a:p>
         </p:txBody>
@@ -4420,7 +4796,7 @@
                   <a:srgbClr val="0B3D2E"/>
                 </a:solidFill>
               </a:rPr>
-              <a:t>🧪 Laboratorio guiado</a:t>
+              <a:t>📔 Glosario</a:t>
             </a:r>
           </a:p>
         </p:txBody>
@@ -4458,97 +4834,97 @@
                   <a:srgbClr val="22282E"/>
                 </a:solidFill>
               </a:rPr>
-              <a:t>•  Habilita el reenvío en la máquina atacante (para MitM transparente):</a:t>
-            </a:r>
-          </a:p>
-          <a:p>
-            <a:pPr>
-              <a:spcAft>
-                <a:spcPts val="600"/>
-              </a:spcAft>
-            </a:pPr>
-            <a:r>
-              <a:rPr sz="1500">
-                <a:solidFill>
-                  <a:srgbClr val="22282E"/>
-                </a:solidFill>
-              </a:rPr>
-              <a:t>•  sudo sysctl -w net.ipv4.ipforward=1</a:t>
-            </a:r>
-          </a:p>
-          <a:p>
-            <a:pPr>
-              <a:spcAft>
-                <a:spcPts val="600"/>
-              </a:spcAft>
-            </a:pPr>
-            <a:r>
-              <a:rPr sz="1500">
-                <a:solidFill>
-                  <a:srgbClr val="22282E"/>
-                </a:solidFill>
-              </a:rPr>
-              <a:t>•  ARP spoofing entre víctima y gateway con bettercap:</a:t>
-            </a:r>
-          </a:p>
-          <a:p>
-            <a:pPr>
-              <a:spcAft>
-                <a:spcPts val="600"/>
-              </a:spcAft>
-            </a:pPr>
-            <a:r>
-              <a:rPr sz="1500">
-                <a:solidFill>
-                  <a:srgbClr val="22282E"/>
-                </a:solidFill>
-              </a:rPr>
-              <a:t>•  sudo bettercap -iface eth0</a:t>
-            </a:r>
-          </a:p>
-          <a:p>
-            <a:pPr>
-              <a:spcAft>
-                <a:spcPts val="600"/>
-              </a:spcAft>
-            </a:pPr>
-            <a:r>
-              <a:rPr sz="1500">
-                <a:solidFill>
-                  <a:srgbClr val="22282E"/>
-                </a:solidFill>
-              </a:rPr>
-              <a:t>•  set arp.spoof.targets 192.168.56.10</a:t>
-            </a:r>
-          </a:p>
-          <a:p>
-            <a:pPr>
-              <a:spcAft>
-                <a:spcPts val="600"/>
-              </a:spcAft>
-            </a:pPr>
-            <a:r>
-              <a:rPr sz="1500">
-                <a:solidFill>
-                  <a:srgbClr val="22282E"/>
-                </a:solidFill>
-              </a:rPr>
-              <a:t>•  arp.spoof on</a:t>
-            </a:r>
-          </a:p>
-          <a:p>
-            <a:pPr>
-              <a:spcAft>
-                <a:spcPts val="600"/>
-              </a:spcAft>
-            </a:pPr>
-            <a:r>
-              <a:rPr sz="1500">
-                <a:solidFill>
-                  <a:srgbClr val="22282E"/>
-                </a:solidFill>
-              </a:rPr>
-              <a:t>•  net.sniff on</a:t>
+              <a:t>•  Término — Definición concisa</a:t>
+            </a:r>
+          </a:p>
+          <a:p>
+            <a:pPr>
+              <a:spcAft>
+                <a:spcPts val="600"/>
+              </a:spcAft>
+            </a:pPr>
+            <a:r>
+              <a:rPr sz="1500">
+                <a:solidFill>
+                  <a:srgbClr val="22282E"/>
+                </a:solidFill>
+              </a:rPr>
+              <a:t>•  ARP — Traduce una IP en la MAC correspondiente; sin autenticación por diseño</a:t>
+            </a:r>
+          </a:p>
+          <a:p>
+            <a:pPr>
+              <a:spcAft>
+                <a:spcPts val="600"/>
+              </a:spcAft>
+            </a:pPr>
+            <a:r>
+              <a:rPr sz="1500">
+                <a:solidFill>
+                  <a:srgbClr val="22282E"/>
+                </a:solidFill>
+              </a:rPr>
+              <a:t>•  Caché ARP — Tabla local IP→MAC que el ARP spoofing envenena</a:t>
+            </a:r>
+          </a:p>
+          <a:p>
+            <a:pPr>
+              <a:spcAft>
+                <a:spcPts val="600"/>
+              </a:spcAft>
+            </a:pPr>
+            <a:r>
+              <a:rPr sz="1500">
+                <a:solidFill>
+                  <a:srgbClr val="22282E"/>
+                </a:solidFill>
+              </a:rPr>
+              <a:t>•  ARP spoofing / poisoning — Respuestas ARP falsas para interceptar tráfico en la LAN</a:t>
+            </a:r>
+          </a:p>
+          <a:p>
+            <a:pPr>
+              <a:spcAft>
+                <a:spcPts val="600"/>
+              </a:spcAft>
+            </a:pPr>
+            <a:r>
+              <a:rPr sz="1500">
+                <a:solidFill>
+                  <a:srgbClr val="22282E"/>
+                </a:solidFill>
+              </a:rPr>
+              <a:t>•  Man-in-the-middle L2 — Interposición del atacante entre dos hosts del mismo segmento</a:t>
+            </a:r>
+          </a:p>
+          <a:p>
+            <a:pPr>
+              <a:spcAft>
+                <a:spcPts val="600"/>
+              </a:spcAft>
+            </a:pPr>
+            <a:r>
+              <a:rPr sz="1500">
+                <a:solidFill>
+                  <a:srgbClr val="22282E"/>
+                </a:solidFill>
+              </a:rPr>
+              <a:t>•  Tabla CAM — Tabla del switch que asocia cada MAC a un puerto</a:t>
+            </a:r>
+          </a:p>
+          <a:p>
+            <a:pPr>
+              <a:spcAft>
+                <a:spcPts val="600"/>
+              </a:spcAft>
+            </a:pPr>
+            <a:r>
+              <a:rPr sz="1500">
+                <a:solidFill>
+                  <a:srgbClr val="22282E"/>
+                </a:solidFill>
+              </a:rPr>
+              <a:t>•  MAC flooding — Saturar la CAM para degradar el switch a comportamiento de hub</a:t>
             </a:r>
           </a:p>
         </p:txBody>
@@ -4599,7 +4975,7 @@
                   <a:srgbClr val="0B3D2E"/>
                 </a:solidFill>
               </a:rPr>
-              <a:t>✍️ Ejercicios</a:t>
+              <a:t>🧰 Herramientas y preparación</a:t>
             </a:r>
           </a:p>
         </p:txBody>
@@ -4637,82 +5013,67 @@
                   <a:srgbClr val="22282E"/>
                 </a:solidFill>
               </a:rPr>
-              <a:t>•  Ejecuta ARP spoofing y demuestra que puedes ver el tráfico HTTP de la víctima (en laboratorio).</a:t>
-            </a:r>
-          </a:p>
-          <a:p>
-            <a:pPr>
-              <a:spcAft>
-                <a:spcPts val="600"/>
-              </a:spcAft>
-            </a:pPr>
-            <a:r>
-              <a:rPr sz="1500">
-                <a:solidFill>
-                  <a:srgbClr val="22282E"/>
-                </a:solidFill>
-              </a:rPr>
-              <a:t>•  Observa en Wireshark la firma de un ARP poisoning (respuestas ARP no solicitadas).</a:t>
-            </a:r>
-          </a:p>
-          <a:p>
-            <a:pPr>
-              <a:spcAft>
-                <a:spcPts val="600"/>
-              </a:spcAft>
-            </a:pPr>
-            <a:r>
-              <a:rPr sz="1500">
-                <a:solidFill>
-                  <a:srgbClr val="22282E"/>
-                </a:solidFill>
-              </a:rPr>
-              <a:t>•  Reproduce MAC flooding y explica por qué convierte el switch en un hub.</a:t>
-            </a:r>
-          </a:p>
-          <a:p>
-            <a:pPr>
-              <a:spcAft>
-                <a:spcPts val="600"/>
-              </a:spcAft>
-            </a:pPr>
-            <a:r>
-              <a:rPr sz="1500">
-                <a:solidFill>
-                  <a:srgbClr val="22282E"/>
-                </a:solidFill>
-              </a:rPr>
-              <a:t>•  Explica paso a paso cómo funciona el double tagging y por qué es unidireccional.</a:t>
-            </a:r>
-          </a:p>
-          <a:p>
-            <a:pPr>
-              <a:spcAft>
-                <a:spcPts val="600"/>
-              </a:spcAft>
-            </a:pPr>
-            <a:r>
-              <a:rPr sz="1500">
-                <a:solidFill>
-                  <a:srgbClr val="22282E"/>
-                </a:solidFill>
-              </a:rPr>
-              <a:t>•  Configura port security en un switch de laboratorio y verifica que bloquea macof.</a:t>
-            </a:r>
-          </a:p>
-          <a:p>
-            <a:pPr>
-              <a:spcAft>
-                <a:spcPts val="600"/>
-              </a:spcAft>
-            </a:pPr>
-            <a:r>
-              <a:rPr sz="1500">
-                <a:solidFill>
-                  <a:srgbClr val="22282E"/>
-                </a:solidFill>
-              </a:rPr>
-              <a:t>•  Investiga cómo DAI usa la tabla de DHCP snooping para validar ARP.</a:t>
+              <a:t>•  ettercap / bettercap para ARP spoofing y MitM.</a:t>
+            </a:r>
+          </a:p>
+          <a:p>
+            <a:pPr>
+              <a:spcAft>
+                <a:spcPts val="600"/>
+              </a:spcAft>
+            </a:pPr>
+            <a:r>
+              <a:rPr sz="1500">
+                <a:solidFill>
+                  <a:srgbClr val="22282E"/>
+                </a:solidFill>
+              </a:rPr>
+              <a:t>•  macof (dsniff) para MAC flooding.</a:t>
+            </a:r>
+          </a:p>
+          <a:p>
+            <a:pPr>
+              <a:spcAft>
+                <a:spcPts val="600"/>
+              </a:spcAft>
+            </a:pPr>
+            <a:r>
+              <a:rPr sz="1500">
+                <a:solidFill>
+                  <a:srgbClr val="22282E"/>
+                </a:solidFill>
+              </a:rPr>
+              <a:t>•  yersinia para ataques a STP/DTP/VLAN.</a:t>
+            </a:r>
+          </a:p>
+          <a:p>
+            <a:pPr>
+              <a:spcAft>
+                <a:spcPts val="600"/>
+              </a:spcAft>
+            </a:pPr>
+            <a:r>
+              <a:rPr sz="1500">
+                <a:solidFill>
+                  <a:srgbClr val="22282E"/>
+                </a:solidFill>
+              </a:rPr>
+              <a:t>•  scapy para construir tramas 802.1Q a medida.</a:t>
+            </a:r>
+          </a:p>
+          <a:p>
+            <a:pPr>
+              <a:spcAft>
+                <a:spcPts val="600"/>
+              </a:spcAft>
+            </a:pPr>
+            <a:r>
+              <a:rPr sz="1500">
+                <a:solidFill>
+                  <a:srgbClr val="22282E"/>
+                </a:solidFill>
+              </a:rPr>
+              <a:t>•  Laboratorio: varias VMs en un switch virtual; idealmente un switch gestionable (o GNS3/EVE-NG) para practicar VLANs y contramedidas.</a:t>
             </a:r>
           </a:p>
         </p:txBody>
@@ -4763,7 +5124,7 @@
                   <a:srgbClr val="0B3D2E"/>
                 </a:solidFill>
               </a:rPr>
-              <a:t>📝 Reto verificable</a:t>
+              <a:t>🧪 Laboratorio guiado</a:t>
             </a:r>
           </a:p>
         </p:txBody>
@@ -4801,22 +5162,97 @@
                   <a:srgbClr val="22282E"/>
                 </a:solidFill>
               </a:rPr>
-              <a:t>•  En tu laboratorio, posiciona la máquina atacante como MitM entre dos VMs mediante ARP spoofing y demuestra la intercepción de una comunicación en claro. Después, aplica una contramedida (DAI en el switch o entradas ARP estáticas en las víctimas) y demuestra que el ataque ya no funciona. Entrega capturas de ambas fases.</a:t>
-            </a:r>
-          </a:p>
-          <a:p>
-            <a:pPr>
-              <a:spcAft>
-                <a:spcPts val="600"/>
-              </a:spcAft>
-            </a:pPr>
-            <a:r>
-              <a:rPr sz="1500">
-                <a:solidFill>
-                  <a:srgbClr val="22282E"/>
-                </a:solidFill>
-              </a:rPr>
-              <a:t>•  Criterio de aceptación: en la fase de ataque interceptas tráfico entre las dos VMs; tras la contramedida, la tabla ARP de la víctima ya no se envenena y no capturas su tráfico. Todo en entorno propio.</a:t>
+              <a:t>•  Habilita el reenvío en la máquina atacante (para MitM transparente):</a:t>
+            </a:r>
+          </a:p>
+          <a:p>
+            <a:pPr>
+              <a:spcAft>
+                <a:spcPts val="600"/>
+              </a:spcAft>
+            </a:pPr>
+            <a:r>
+              <a:rPr sz="1500">
+                <a:solidFill>
+                  <a:srgbClr val="22282E"/>
+                </a:solidFill>
+              </a:rPr>
+              <a:t>•  ARP spoofing entre víctima y gateway con bettercap:</a:t>
+            </a:r>
+          </a:p>
+          <a:p>
+            <a:pPr>
+              <a:spcAft>
+                <a:spcPts val="600"/>
+              </a:spcAft>
+            </a:pPr>
+            <a:r>
+              <a:rPr sz="1500">
+                <a:solidFill>
+                  <a:srgbClr val="22282E"/>
+                </a:solidFill>
+              </a:rPr>
+              <a:t>•  Verifica el envenenamiento desde la víctima:</a:t>
+            </a:r>
+          </a:p>
+          <a:p>
+            <a:pPr>
+              <a:spcAft>
+                <a:spcPts val="600"/>
+              </a:spcAft>
+            </a:pPr>
+            <a:r>
+              <a:rPr sz="1500">
+                <a:solidFill>
+                  <a:srgbClr val="22282E"/>
+                </a:solidFill>
+              </a:rPr>
+              <a:t>•  MAC flooding en un switch de laboratorio (observa el fail-open):</a:t>
+            </a:r>
+          </a:p>
+          <a:p>
+            <a:pPr>
+              <a:spcAft>
+                <a:spcPts val="600"/>
+              </a:spcAft>
+            </a:pPr>
+            <a:r>
+              <a:rPr sz="1500">
+                <a:solidFill>
+                  <a:srgbClr val="22282E"/>
+                </a:solidFill>
+              </a:rPr>
+              <a:t>•  Captura en paralelo para ver tráfico que antes no verías.</a:t>
+            </a:r>
+          </a:p>
+          <a:p>
+            <a:pPr>
+              <a:spcAft>
+                <a:spcPts val="600"/>
+              </a:spcAft>
+            </a:pPr>
+            <a:r>
+              <a:rPr sz="1500">
+                <a:solidFill>
+                  <a:srgbClr val="22282E"/>
+                </a:solidFill>
+              </a:rPr>
+              <a:t>•  VLAN hopping por double tagging con scapy (esquema):</a:t>
+            </a:r>
+          </a:p>
+          <a:p>
+            <a:pPr>
+              <a:spcAft>
+                <a:spcPts val="600"/>
+              </a:spcAft>
+            </a:pPr>
+            <a:r>
+              <a:rPr sz="1500">
+                <a:solidFill>
+                  <a:srgbClr val="22282E"/>
+                </a:solidFill>
+              </a:rPr>
+              <a:t>•  Detección defensiva: en Wireshark filtra arp.duplicate-address-detected y observa múltiples MAC para una misma IP.</a:t>
             </a:r>
           </a:p>
         </p:txBody>
